--- a/Project_Aegis_DAE.pptx
+++ b/Project_Aegis_DAE.pptx
@@ -8103,7 +8103,7 @@
                 <a:ea typeface="Calibri" pitchFamily="34" charset="-122"/>
                 <a:cs typeface="Calibri" pitchFamily="34" charset="-120"/>
               </a:rPr>
-              <a:t>THE INVESTMENT CASE</a:t>
+              <a:t>THE ECONOMIC CASE</a:t>
             </a:r>
             <a:endParaRPr lang="en-US" sz="1100" dirty="0"/>
           </a:p>
@@ -8141,7 +8141,7 @@
         <p:spPr>
           <a:xfrm>
             <a:off x="640080" y="960120"/>
-            <a:ext cx="7315200" cy="411480"/>
+            <a:ext cx="7772400" cy="411480"/>
           </a:xfrm>
           <a:prstGeom prst="rect">
             <a:avLst/>
@@ -8165,7 +8165,7 @@
                 <a:ea typeface="Georgia" pitchFamily="34" charset="-122"/>
                 <a:cs typeface="Georgia" pitchFamily="34" charset="-120"/>
               </a:rPr>
-              <a:t>Resources &amp; Timeline</a:t>
+              <a:t>Why Autonomous Remediation Pays for Itself</a:t>
             </a:r>
             <a:endParaRPr lang="en-US" sz="2200" dirty="0"/>
           </a:p>
@@ -8180,7 +8180,7 @@
         <p:spPr>
           <a:xfrm>
             <a:off x="640080" y="1554480"/>
-            <a:ext cx="3794760" cy="2011680"/>
+            <a:ext cx="3794760" cy="2377440"/>
           </a:xfrm>
           <a:prstGeom prst="rect">
             <a:avLst/>
@@ -8206,7 +8206,7 @@
             <a:avLst/>
           </a:prstGeom>
           <a:solidFill>
-            <a:srgbClr val="C9A84C"/>
+            <a:srgbClr val="E24B4A"/>
           </a:solidFill>
           <a:ln/>
         </p:spPr>
@@ -8219,7 +8219,7 @@
         </p:nvSpPr>
         <p:spPr>
           <a:xfrm>
-            <a:off x="822960" y="1737360"/>
+            <a:off x="822960" y="1719072"/>
             <a:ext cx="3383280" cy="256032"/>
           </a:xfrm>
           <a:prstGeom prst="rect">
@@ -8238,13 +8238,13 @@
             <a:r>
               <a:rPr lang="en-US" sz="1100" b="1" spc="200" kern="0" dirty="0">
                 <a:solidFill>
-                  <a:srgbClr val="C9A84C"/>
+                  <a:srgbClr val="E24B4A"/>
                 </a:solidFill>
                 <a:latin typeface="Calibri" pitchFamily="34" charset="0"/>
                 <a:ea typeface="Calibri" pitchFamily="34" charset="-122"/>
                 <a:cs typeface="Calibri" pitchFamily="34" charset="-120"/>
               </a:rPr>
-              <a:t>TIGER TEAM</a:t>
+              <a:t>COST OF INACTION</a:t>
             </a:r>
             <a:endParaRPr lang="en-US" sz="1100" dirty="0"/>
           </a:p>
@@ -8258,27 +8258,63 @@
         </p:nvSpPr>
         <p:spPr>
           <a:xfrm>
-            <a:off x="822960" y="2103120"/>
-            <a:ext cx="3383280" cy="1280160"/>
-          </a:xfrm>
-          <a:prstGeom prst="rect">
-            <a:avLst/>
-          </a:prstGeom>
-          <a:noFill/>
-          <a:ln/>
-        </p:spPr>
-        <p:txBody>
-          <a:bodyPr wrap="square" lIns="0" tIns="0" rIns="0" bIns="0" rtlCol="0" anchor="ctr"/>
-          <a:lstStyle/>
-          <a:p>
-            <a:pPr indent="0" marL="0">
-              <a:spcAft>
-                <a:spcPts val="600"/>
-              </a:spcAft>
-              <a:buNone/>
-            </a:pPr>
-            <a:r>
-              <a:rPr lang="en-US" sz="1300" dirty="0">
+            <a:off x="822960" y="2084832"/>
+            <a:ext cx="1097280" cy="256032"/>
+          </a:xfrm>
+          <a:prstGeom prst="rect">
+            <a:avLst/>
+          </a:prstGeom>
+          <a:noFill/>
+          <a:ln/>
+        </p:spPr>
+        <p:txBody>
+          <a:bodyPr wrap="square" lIns="0" tIns="0" rIns="0" bIns="0" rtlCol="0" anchor="ctr"/>
+          <a:lstStyle/>
+          <a:p>
+            <a:pPr indent="0" marL="0">
+              <a:buNone/>
+            </a:pPr>
+            <a:r>
+              <a:rPr lang="en-US" sz="1600" b="1" dirty="0">
+                <a:solidFill>
+                  <a:srgbClr val="E24B4A"/>
+                </a:solidFill>
+                <a:latin typeface="Georgia" pitchFamily="34" charset="0"/>
+                <a:ea typeface="Georgia" pitchFamily="34" charset="-122"/>
+                <a:cs typeface="Georgia" pitchFamily="34" charset="-120"/>
+              </a:rPr>
+              <a:t>$4.4M</a:t>
+            </a:r>
+            <a:endParaRPr lang="en-US" sz="1600" dirty="0"/>
+          </a:p>
+        </p:txBody>
+      </p:sp>
+      <p:sp>
+        <p:nvSpPr>
+          <p:cNvPr id="10" name="Text 7"/>
+          <p:cNvSpPr/>
+          <p:nvPr/>
+        </p:nvSpPr>
+        <p:spPr>
+          <a:xfrm>
+            <a:off x="1965960" y="2084832"/>
+            <a:ext cx="2286000" cy="457200"/>
+          </a:xfrm>
+          <a:prstGeom prst="rect">
+            <a:avLst/>
+          </a:prstGeom>
+          <a:noFill/>
+          <a:ln/>
+        </p:spPr>
+        <p:txBody>
+          <a:bodyPr wrap="square" lIns="0" tIns="0" rIns="0" bIns="0" rtlCol="0" anchor="ctr"/>
+          <a:lstStyle/>
+          <a:p>
+            <a:pPr indent="0" marL="0">
+              <a:buNone/>
+            </a:pPr>
+            <a:r>
+              <a:rPr lang="en-US" sz="1100" dirty="0">
                 <a:solidFill>
                   <a:srgbClr val="999999"/>
                 </a:solidFill>
@@ -8286,19 +8322,77 @@
                 <a:ea typeface="Calibri" pitchFamily="34" charset="-122"/>
                 <a:cs typeface="Calibri" pitchFamily="34" charset="-120"/>
               </a:rPr>
-              <a:t>1  Lead AI Architect</a:t>
-            </a:r>
-            <a:endParaRPr lang="en-US" sz="1300" dirty="0"/>
-          </a:p>
-          <a:p>
-            <a:pPr indent="0" marL="0">
-              <a:spcAft>
-                <a:spcPts val="600"/>
-              </a:spcAft>
-              <a:buNone/>
-            </a:pPr>
-            <a:r>
-              <a:rPr lang="en-US" sz="1300" dirty="0">
+              <a:t>Avg. cost of a single Domain Admin compromise (IBM Data Breach Report)</a:t>
+            </a:r>
+            <a:endParaRPr lang="en-US" sz="1100" dirty="0"/>
+          </a:p>
+        </p:txBody>
+      </p:sp>
+      <p:sp>
+        <p:nvSpPr>
+          <p:cNvPr id="11" name="Text 8"/>
+          <p:cNvSpPr/>
+          <p:nvPr/>
+        </p:nvSpPr>
+        <p:spPr>
+          <a:xfrm>
+            <a:off x="822960" y="2679192"/>
+            <a:ext cx="1097280" cy="256032"/>
+          </a:xfrm>
+          <a:prstGeom prst="rect">
+            <a:avLst/>
+          </a:prstGeom>
+          <a:noFill/>
+          <a:ln/>
+        </p:spPr>
+        <p:txBody>
+          <a:bodyPr wrap="square" lIns="0" tIns="0" rIns="0" bIns="0" rtlCol="0" anchor="ctr"/>
+          <a:lstStyle/>
+          <a:p>
+            <a:pPr indent="0" marL="0">
+              <a:buNone/>
+            </a:pPr>
+            <a:r>
+              <a:rPr lang="en-US" sz="1600" b="1" dirty="0">
+                <a:solidFill>
+                  <a:srgbClr val="E24B4A"/>
+                </a:solidFill>
+                <a:latin typeface="Georgia" pitchFamily="34" charset="0"/>
+                <a:ea typeface="Georgia" pitchFamily="34" charset="-122"/>
+                <a:cs typeface="Georgia" pitchFamily="34" charset="-120"/>
+              </a:rPr>
+              <a:t>45 days</a:t>
+            </a:r>
+            <a:endParaRPr lang="en-US" sz="1600" dirty="0"/>
+          </a:p>
+        </p:txBody>
+      </p:sp>
+      <p:sp>
+        <p:nvSpPr>
+          <p:cNvPr id="12" name="Text 9"/>
+          <p:cNvSpPr/>
+          <p:nvPr/>
+        </p:nvSpPr>
+        <p:spPr>
+          <a:xfrm>
+            <a:off x="1965960" y="2679192"/>
+            <a:ext cx="2286000" cy="457200"/>
+          </a:xfrm>
+          <a:prstGeom prst="rect">
+            <a:avLst/>
+          </a:prstGeom>
+          <a:noFill/>
+          <a:ln/>
+        </p:spPr>
+        <p:txBody>
+          <a:bodyPr wrap="square" lIns="0" tIns="0" rIns="0" bIns="0" rtlCol="0" anchor="ctr"/>
+          <a:lstStyle/>
+          <a:p>
+            <a:pPr indent="0" marL="0">
+              <a:buNone/>
+            </a:pPr>
+            <a:r>
+              <a:rPr lang="en-US" sz="1100" dirty="0">
                 <a:solidFill>
                   <a:srgbClr val="999999"/>
                 </a:solidFill>
@@ -8306,19 +8400,77 @@
                 <a:ea typeface="Calibri" pitchFamily="34" charset="-122"/>
                 <a:cs typeface="Calibri" pitchFamily="34" charset="-120"/>
               </a:rPr>
-              <a:t>4  Backend / Systems Engineers</a:t>
-            </a:r>
-            <a:endParaRPr lang="en-US" sz="1300" dirty="0"/>
-          </a:p>
-          <a:p>
-            <a:pPr indent="0" marL="0">
-              <a:spcAft>
-                <a:spcPts val="600"/>
-              </a:spcAft>
-              <a:buNone/>
-            </a:pPr>
-            <a:r>
-              <a:rPr lang="en-US" sz="1300" dirty="0">
+              <a:t>Mean time to remediate — every day is an open exposure window</a:t>
+            </a:r>
+            <a:endParaRPr lang="en-US" sz="1100" dirty="0"/>
+          </a:p>
+        </p:txBody>
+      </p:sp>
+      <p:sp>
+        <p:nvSpPr>
+          <p:cNvPr id="13" name="Text 10"/>
+          <p:cNvSpPr/>
+          <p:nvPr/>
+        </p:nvSpPr>
+        <p:spPr>
+          <a:xfrm>
+            <a:off x="822960" y="3273552"/>
+            <a:ext cx="1097280" cy="256032"/>
+          </a:xfrm>
+          <a:prstGeom prst="rect">
+            <a:avLst/>
+          </a:prstGeom>
+          <a:noFill/>
+          <a:ln/>
+        </p:spPr>
+        <p:txBody>
+          <a:bodyPr wrap="square" lIns="0" tIns="0" rIns="0" bIns="0" rtlCol="0" anchor="ctr"/>
+          <a:lstStyle/>
+          <a:p>
+            <a:pPr indent="0" marL="0">
+              <a:buNone/>
+            </a:pPr>
+            <a:r>
+              <a:rPr lang="en-US" sz="1600" b="1" dirty="0">
+                <a:solidFill>
+                  <a:srgbClr val="E24B4A"/>
+                </a:solidFill>
+                <a:latin typeface="Georgia" pitchFamily="34" charset="0"/>
+                <a:ea typeface="Georgia" pitchFamily="34" charset="-122"/>
+                <a:cs typeface="Georgia" pitchFamily="34" charset="-120"/>
+              </a:rPr>
+              <a:t>70%</a:t>
+            </a:r>
+            <a:endParaRPr lang="en-US" sz="1600" dirty="0"/>
+          </a:p>
+        </p:txBody>
+      </p:sp>
+      <p:sp>
+        <p:nvSpPr>
+          <p:cNvPr id="14" name="Text 11"/>
+          <p:cNvSpPr/>
+          <p:nvPr/>
+        </p:nvSpPr>
+        <p:spPr>
+          <a:xfrm>
+            <a:off x="1965960" y="3273552"/>
+            <a:ext cx="2286000" cy="457200"/>
+          </a:xfrm>
+          <a:prstGeom prst="rect">
+            <a:avLst/>
+          </a:prstGeom>
+          <a:noFill/>
+          <a:ln/>
+        </p:spPr>
+        <p:txBody>
+          <a:bodyPr wrap="square" lIns="0" tIns="0" rIns="0" bIns="0" rtlCol="0" anchor="ctr"/>
+          <a:lstStyle/>
+          <a:p>
+            <a:pPr indent="0" marL="0">
+              <a:buNone/>
+            </a:pPr>
+            <a:r>
+              <a:rPr lang="en-US" sz="1100" dirty="0">
                 <a:solidFill>
                   <a:srgbClr val="999999"/>
                 </a:solidFill>
@@ -8326,42 +8478,335 @@
                 <a:ea typeface="Calibri" pitchFamily="34" charset="-122"/>
                 <a:cs typeface="Calibri" pitchFamily="34" charset="-120"/>
               </a:rPr>
-              <a:t>2  Security Researchers (Prompt Eng.)</a:t>
-            </a:r>
-            <a:endParaRPr lang="en-US" sz="1300" dirty="0"/>
-          </a:p>
-          <a:p>
-            <a:pPr indent="0" marL="0">
-              <a:spcAft>
-                <a:spcPts val="600"/>
-              </a:spcAft>
-              <a:buNone/>
-            </a:pPr>
-            <a:r>
-              <a:rPr lang="en-US" sz="1300" dirty="0">
-                <a:solidFill>
-                  <a:srgbClr val="999999"/>
+              <a:t>Of critical paths from Q1 remain unpatched in Q3, compounding liability</a:t>
+            </a:r>
+            <a:endParaRPr lang="en-US" sz="1100" dirty="0"/>
+          </a:p>
+        </p:txBody>
+      </p:sp>
+      <p:sp>
+        <p:nvSpPr>
+          <p:cNvPr id="15" name="Shape 12"/>
+          <p:cNvSpPr/>
+          <p:nvPr/>
+        </p:nvSpPr>
+        <p:spPr>
+          <a:xfrm>
+            <a:off x="4709160" y="1554480"/>
+            <a:ext cx="3794760" cy="2377440"/>
+          </a:xfrm>
+          <a:prstGeom prst="rect">
+            <a:avLst/>
+          </a:prstGeom>
+          <a:solidFill>
+            <a:srgbClr val="1A1A1A"/>
+          </a:solidFill>
+          <a:ln/>
+        </p:spPr>
+      </p:sp>
+      <p:sp>
+        <p:nvSpPr>
+          <p:cNvPr id="16" name="Shape 13"/>
+          <p:cNvSpPr/>
+          <p:nvPr/>
+        </p:nvSpPr>
+        <p:spPr>
+          <a:xfrm>
+            <a:off x="4709160" y="1554480"/>
+            <a:ext cx="3794760" cy="54864"/>
+          </a:xfrm>
+          <a:prstGeom prst="rect">
+            <a:avLst/>
+          </a:prstGeom>
+          <a:solidFill>
+            <a:srgbClr val="1D9E75"/>
+          </a:solidFill>
+          <a:ln/>
+        </p:spPr>
+      </p:sp>
+      <p:sp>
+        <p:nvSpPr>
+          <p:cNvPr id="17" name="Text 14"/>
+          <p:cNvSpPr/>
+          <p:nvPr/>
+        </p:nvSpPr>
+        <p:spPr>
+          <a:xfrm>
+            <a:off x="4892040" y="1719072"/>
+            <a:ext cx="3383280" cy="256032"/>
+          </a:xfrm>
+          <a:prstGeom prst="rect">
+            <a:avLst/>
+          </a:prstGeom>
+          <a:noFill/>
+          <a:ln/>
+        </p:spPr>
+        <p:txBody>
+          <a:bodyPr wrap="square" lIns="0" tIns="0" rIns="0" bIns="0" rtlCol="0" anchor="ctr"/>
+          <a:lstStyle/>
+          <a:p>
+            <a:pPr indent="0" marL="0">
+              <a:buNone/>
+            </a:pPr>
+            <a:r>
+              <a:rPr lang="en-US" sz="1100" b="1" spc="200" kern="0" dirty="0">
+                <a:solidFill>
+                  <a:srgbClr val="1D9E75"/>
                 </a:solidFill>
                 <a:latin typeface="Calibri" pitchFamily="34" charset="0"/>
                 <a:ea typeface="Calibri" pitchFamily="34" charset="-122"/>
                 <a:cs typeface="Calibri" pitchFamily="34" charset="-120"/>
               </a:rPr>
-              <a:t>1  Product Designer</a:t>
-            </a:r>
-            <a:endParaRPr lang="en-US" sz="1300" dirty="0"/>
-          </a:p>
-        </p:txBody>
-      </p:sp>
-      <p:sp>
-        <p:nvSpPr>
-          <p:cNvPr id="10" name="Shape 7"/>
-          <p:cNvSpPr/>
-          <p:nvPr/>
-        </p:nvSpPr>
-        <p:spPr>
-          <a:xfrm>
-            <a:off x="4709160" y="1554480"/>
-            <a:ext cx="3794760" cy="2011680"/>
+              <a:t>RETURN ON DAE</a:t>
+            </a:r>
+            <a:endParaRPr lang="en-US" sz="1100" dirty="0"/>
+          </a:p>
+        </p:txBody>
+      </p:sp>
+      <p:sp>
+        <p:nvSpPr>
+          <p:cNvPr id="18" name="Text 15"/>
+          <p:cNvSpPr/>
+          <p:nvPr/>
+        </p:nvSpPr>
+        <p:spPr>
+          <a:xfrm>
+            <a:off x="4892040" y="2084832"/>
+            <a:ext cx="1097280" cy="256032"/>
+          </a:xfrm>
+          <a:prstGeom prst="rect">
+            <a:avLst/>
+          </a:prstGeom>
+          <a:noFill/>
+          <a:ln/>
+        </p:spPr>
+        <p:txBody>
+          <a:bodyPr wrap="square" lIns="0" tIns="0" rIns="0" bIns="0" rtlCol="0" anchor="ctr"/>
+          <a:lstStyle/>
+          <a:p>
+            <a:pPr indent="0" marL="0">
+              <a:buNone/>
+            </a:pPr>
+            <a:r>
+              <a:rPr lang="en-US" sz="1600" b="1" dirty="0">
+                <a:solidFill>
+                  <a:srgbClr val="1D9E75"/>
+                </a:solidFill>
+                <a:latin typeface="Georgia" pitchFamily="34" charset="0"/>
+                <a:ea typeface="Georgia" pitchFamily="34" charset="-122"/>
+                <a:cs typeface="Georgia" pitchFamily="34" charset="-120"/>
+              </a:rPr>
+              <a:t>90%</a:t>
+            </a:r>
+            <a:endParaRPr lang="en-US" sz="1600" dirty="0"/>
+          </a:p>
+        </p:txBody>
+      </p:sp>
+      <p:sp>
+        <p:nvSpPr>
+          <p:cNvPr id="19" name="Text 16"/>
+          <p:cNvSpPr/>
+          <p:nvPr/>
+        </p:nvSpPr>
+        <p:spPr>
+          <a:xfrm>
+            <a:off x="6035040" y="2084832"/>
+            <a:ext cx="2286000" cy="457200"/>
+          </a:xfrm>
+          <a:prstGeom prst="rect">
+            <a:avLst/>
+          </a:prstGeom>
+          <a:noFill/>
+          <a:ln/>
+        </p:spPr>
+        <p:txBody>
+          <a:bodyPr wrap="square" lIns="0" tIns="0" rIns="0" bIns="0" rtlCol="0" anchor="ctr"/>
+          <a:lstStyle/>
+          <a:p>
+            <a:pPr indent="0" marL="0">
+              <a:buNone/>
+            </a:pPr>
+            <a:r>
+              <a:rPr lang="en-US" sz="1100" dirty="0">
+                <a:solidFill>
+                  <a:srgbClr val="999999"/>
+                </a:solidFill>
+                <a:latin typeface="Calibri" pitchFamily="34" charset="0"/>
+                <a:ea typeface="Calibri" pitchFamily="34" charset="-122"/>
+                <a:cs typeface="Calibri" pitchFamily="34" charset="-120"/>
+              </a:rPr>
+              <a:t>MTTR reduction — remediation in minutes, not weeks</a:t>
+            </a:r>
+            <a:endParaRPr lang="en-US" sz="1100" dirty="0"/>
+          </a:p>
+        </p:txBody>
+      </p:sp>
+      <p:sp>
+        <p:nvSpPr>
+          <p:cNvPr id="20" name="Text 17"/>
+          <p:cNvSpPr/>
+          <p:nvPr/>
+        </p:nvSpPr>
+        <p:spPr>
+          <a:xfrm>
+            <a:off x="4892040" y="2679192"/>
+            <a:ext cx="1097280" cy="256032"/>
+          </a:xfrm>
+          <a:prstGeom prst="rect">
+            <a:avLst/>
+          </a:prstGeom>
+          <a:noFill/>
+          <a:ln/>
+        </p:spPr>
+        <p:txBody>
+          <a:bodyPr wrap="square" lIns="0" tIns="0" rIns="0" bIns="0" rtlCol="0" anchor="ctr"/>
+          <a:lstStyle/>
+          <a:p>
+            <a:pPr indent="0" marL="0">
+              <a:buNone/>
+            </a:pPr>
+            <a:r>
+              <a:rPr lang="en-US" sz="1600" b="1" dirty="0">
+                <a:solidFill>
+                  <a:srgbClr val="1D9E75"/>
+                </a:solidFill>
+                <a:latin typeface="Georgia" pitchFamily="34" charset="0"/>
+                <a:ea typeface="Georgia" pitchFamily="34" charset="-122"/>
+                <a:cs typeface="Georgia" pitchFamily="34" charset="-120"/>
+              </a:rPr>
+              <a:t>85%</a:t>
+            </a:r>
+            <a:endParaRPr lang="en-US" sz="1600" dirty="0"/>
+          </a:p>
+        </p:txBody>
+      </p:sp>
+      <p:sp>
+        <p:nvSpPr>
+          <p:cNvPr id="21" name="Text 18"/>
+          <p:cNvSpPr/>
+          <p:nvPr/>
+        </p:nvSpPr>
+        <p:spPr>
+          <a:xfrm>
+            <a:off x="6035040" y="2679192"/>
+            <a:ext cx="2286000" cy="457200"/>
+          </a:xfrm>
+          <a:prstGeom prst="rect">
+            <a:avLst/>
+          </a:prstGeom>
+          <a:noFill/>
+          <a:ln/>
+        </p:spPr>
+        <p:txBody>
+          <a:bodyPr wrap="square" lIns="0" tIns="0" rIns="0" bIns="0" rtlCol="0" anchor="ctr"/>
+          <a:lstStyle/>
+          <a:p>
+            <a:pPr indent="0" marL="0">
+              <a:buNone/>
+            </a:pPr>
+            <a:r>
+              <a:rPr lang="en-US" sz="1100" dirty="0">
+                <a:solidFill>
+                  <a:srgbClr val="999999"/>
+                </a:solidFill>
+                <a:latin typeface="Calibri" pitchFamily="34" charset="0"/>
+                <a:ea typeface="Calibri" pitchFamily="34" charset="-122"/>
+                <a:cs typeface="Calibri" pitchFamily="34" charset="-120"/>
+              </a:rPr>
+              <a:t>Fewer human-hours per incident, freeing SOC for strategic work</a:t>
+            </a:r>
+            <a:endParaRPr lang="en-US" sz="1100" dirty="0"/>
+          </a:p>
+        </p:txBody>
+      </p:sp>
+      <p:sp>
+        <p:nvSpPr>
+          <p:cNvPr id="22" name="Text 19"/>
+          <p:cNvSpPr/>
+          <p:nvPr/>
+        </p:nvSpPr>
+        <p:spPr>
+          <a:xfrm>
+            <a:off x="4892040" y="3273552"/>
+            <a:ext cx="1097280" cy="256032"/>
+          </a:xfrm>
+          <a:prstGeom prst="rect">
+            <a:avLst/>
+          </a:prstGeom>
+          <a:noFill/>
+          <a:ln/>
+        </p:spPr>
+        <p:txBody>
+          <a:bodyPr wrap="square" lIns="0" tIns="0" rIns="0" bIns="0" rtlCol="0" anchor="ctr"/>
+          <a:lstStyle/>
+          <a:p>
+            <a:pPr indent="0" marL="0">
+              <a:buNone/>
+            </a:pPr>
+            <a:r>
+              <a:rPr lang="en-US" sz="1600" b="1" dirty="0">
+                <a:solidFill>
+                  <a:srgbClr val="1D9E75"/>
+                </a:solidFill>
+                <a:latin typeface="Georgia" pitchFamily="34" charset="0"/>
+                <a:ea typeface="Georgia" pitchFamily="34" charset="-122"/>
+                <a:cs typeface="Georgia" pitchFamily="34" charset="-120"/>
+              </a:rPr>
+              <a:t>10x</a:t>
+            </a:r>
+            <a:endParaRPr lang="en-US" sz="1600" dirty="0"/>
+          </a:p>
+        </p:txBody>
+      </p:sp>
+      <p:sp>
+        <p:nvSpPr>
+          <p:cNvPr id="23" name="Text 20"/>
+          <p:cNvSpPr/>
+          <p:nvPr/>
+        </p:nvSpPr>
+        <p:spPr>
+          <a:xfrm>
+            <a:off x="6035040" y="3273552"/>
+            <a:ext cx="2286000" cy="457200"/>
+          </a:xfrm>
+          <a:prstGeom prst="rect">
+            <a:avLst/>
+          </a:prstGeom>
+          <a:noFill/>
+          <a:ln/>
+        </p:spPr>
+        <p:txBody>
+          <a:bodyPr wrap="square" lIns="0" tIns="0" rIns="0" bIns="0" rtlCol="0" anchor="ctr"/>
+          <a:lstStyle/>
+          <a:p>
+            <a:pPr indent="0" marL="0">
+              <a:buNone/>
+            </a:pPr>
+            <a:r>
+              <a:rPr lang="en-US" sz="1100" dirty="0">
+                <a:solidFill>
+                  <a:srgbClr val="999999"/>
+                </a:solidFill>
+                <a:latin typeface="Calibri" pitchFamily="34" charset="0"/>
+                <a:ea typeface="Calibri" pitchFamily="34" charset="-122"/>
+                <a:cs typeface="Calibri" pitchFamily="34" charset="-120"/>
+              </a:rPr>
+              <a:t>Asset volume handled by existing team, zero headcount growth</a:t>
+            </a:r>
+            <a:endParaRPr lang="en-US" sz="1100" dirty="0"/>
+          </a:p>
+        </p:txBody>
+      </p:sp>
+      <p:sp>
+        <p:nvSpPr>
+          <p:cNvPr id="24" name="Shape 21"/>
+          <p:cNvSpPr/>
+          <p:nvPr/>
+        </p:nvSpPr>
+        <p:spPr>
+          <a:xfrm>
+            <a:off x="640080" y="4160520"/>
+            <a:ext cx="7863840" cy="777240"/>
           </a:xfrm>
           <a:prstGeom prst="rect">
             <a:avLst/>
@@ -8374,148 +8819,145 @@
       </p:sp>
       <p:sp>
         <p:nvSpPr>
-          <p:cNvPr id="11" name="Shape 8"/>
-          <p:cNvSpPr/>
-          <p:nvPr/>
-        </p:nvSpPr>
-        <p:spPr>
-          <a:xfrm>
-            <a:off x="4709160" y="1554480"/>
-            <a:ext cx="3794760" cy="54864"/>
+          <p:cNvPr id="25" name="Shape 22"/>
+          <p:cNvSpPr/>
+          <p:nvPr/>
+        </p:nvSpPr>
+        <p:spPr>
+          <a:xfrm>
+            <a:off x="640080" y="4160520"/>
+            <a:ext cx="54864" cy="777240"/>
           </a:xfrm>
           <a:prstGeom prst="rect">
             <a:avLst/>
           </a:prstGeom>
           <a:solidFill>
-            <a:srgbClr val="1D9E75"/>
+            <a:srgbClr val="C9A84C"/>
           </a:solidFill>
           <a:ln/>
         </p:spPr>
       </p:sp>
       <p:sp>
         <p:nvSpPr>
-          <p:cNvPr id="12" name="Text 9"/>
-          <p:cNvSpPr/>
-          <p:nvPr/>
-        </p:nvSpPr>
-        <p:spPr>
-          <a:xfrm>
-            <a:off x="4892040" y="1737360"/>
-            <a:ext cx="3383280" cy="256032"/>
-          </a:xfrm>
-          <a:prstGeom prst="rect">
-            <a:avLst/>
-          </a:prstGeom>
-          <a:noFill/>
-          <a:ln/>
-        </p:spPr>
-        <p:txBody>
-          <a:bodyPr wrap="square" lIns="0" tIns="0" rIns="0" bIns="0" rtlCol="0" anchor="ctr"/>
-          <a:lstStyle/>
-          <a:p>
-            <a:pPr indent="0" marL="0">
-              <a:buNone/>
-            </a:pPr>
-            <a:r>
-              <a:rPr lang="en-US" sz="1100" b="1" spc="200" kern="0" dirty="0">
-                <a:solidFill>
-                  <a:srgbClr val="1D9E75"/>
+          <p:cNvPr id="26" name="Text 23"/>
+          <p:cNvSpPr/>
+          <p:nvPr/>
+        </p:nvSpPr>
+        <p:spPr>
+          <a:xfrm>
+            <a:off x="868680" y="4187952"/>
+            <a:ext cx="2743200" cy="201168"/>
+          </a:xfrm>
+          <a:prstGeom prst="rect">
+            <a:avLst/>
+          </a:prstGeom>
+          <a:noFill/>
+          <a:ln/>
+        </p:spPr>
+        <p:txBody>
+          <a:bodyPr wrap="square" lIns="0" tIns="0" rIns="0" bIns="0" rtlCol="0" anchor="ctr"/>
+          <a:lstStyle/>
+          <a:p>
+            <a:pPr indent="0" marL="0">
+              <a:buNone/>
+            </a:pPr>
+            <a:r>
+              <a:rPr lang="en-US" sz="900" b="1" spc="200" kern="0" dirty="0">
+                <a:solidFill>
+                  <a:srgbClr val="C9A84C"/>
                 </a:solidFill>
                 <a:latin typeface="Calibri" pitchFamily="34" charset="0"/>
                 <a:ea typeface="Calibri" pitchFamily="34" charset="-122"/>
                 <a:cs typeface="Calibri" pitchFamily="34" charset="-120"/>
               </a:rPr>
-              <a:t>TIMELINE</a:t>
-            </a:r>
-            <a:endParaRPr lang="en-US" sz="1100" dirty="0"/>
-          </a:p>
-        </p:txBody>
-      </p:sp>
-      <p:sp>
-        <p:nvSpPr>
-          <p:cNvPr id="13" name="Shape 10"/>
-          <p:cNvSpPr/>
-          <p:nvPr/>
-        </p:nvSpPr>
-        <p:spPr>
-          <a:xfrm>
-            <a:off x="4892040" y="2148840"/>
-            <a:ext cx="73152" cy="320040"/>
-          </a:xfrm>
-          <a:prstGeom prst="rect">
-            <a:avLst/>
-          </a:prstGeom>
-          <a:solidFill>
-            <a:srgbClr val="378ADD"/>
-          </a:solidFill>
-          <a:ln/>
-        </p:spPr>
-      </p:sp>
-      <p:sp>
-        <p:nvSpPr>
-          <p:cNvPr id="14" name="Text 11"/>
-          <p:cNvSpPr/>
-          <p:nvPr/>
-        </p:nvSpPr>
-        <p:spPr>
-          <a:xfrm>
-            <a:off x="5074920" y="2148840"/>
-            <a:ext cx="822960" cy="320040"/>
-          </a:xfrm>
-          <a:prstGeom prst="rect">
-            <a:avLst/>
-          </a:prstGeom>
-          <a:noFill/>
-          <a:ln/>
-        </p:spPr>
-        <p:txBody>
-          <a:bodyPr wrap="square" lIns="0" tIns="0" rIns="0" bIns="0" rtlCol="0" anchor="ctr"/>
-          <a:lstStyle/>
-          <a:p>
-            <a:pPr indent="0" marL="0">
-              <a:buNone/>
-            </a:pPr>
-            <a:r>
-              <a:rPr lang="en-US" sz="1200" b="1" dirty="0">
-                <a:solidFill>
-                  <a:srgbClr val="378ADD"/>
+              <a:t>NET ECONOMIC IMPACT</a:t>
+            </a:r>
+            <a:endParaRPr lang="en-US" sz="900" dirty="0"/>
+          </a:p>
+        </p:txBody>
+      </p:sp>
+      <p:sp>
+        <p:nvSpPr>
+          <p:cNvPr id="27" name="Text 24"/>
+          <p:cNvSpPr/>
+          <p:nvPr/>
+        </p:nvSpPr>
+        <p:spPr>
+          <a:xfrm>
+            <a:off x="914400" y="4407408"/>
+            <a:ext cx="1371600" cy="201168"/>
+          </a:xfrm>
+          <a:prstGeom prst="rect">
+            <a:avLst/>
+          </a:prstGeom>
+          <a:noFill/>
+          <a:ln/>
+        </p:spPr>
+        <p:txBody>
+          <a:bodyPr wrap="square" lIns="0" tIns="0" rIns="0" bIns="0" rtlCol="0" anchor="ctr"/>
+          <a:lstStyle/>
+          <a:p>
+            <a:pPr indent="0" marL="0">
+              <a:buNone/>
+            </a:pPr>
+            <a:r>
+              <a:rPr lang="en-US" sz="1800" b="1" dirty="0">
+                <a:solidFill>
+                  <a:srgbClr val="C9A84C"/>
+                </a:solidFill>
+                <a:latin typeface="Georgia" pitchFamily="34" charset="0"/>
+                <a:ea typeface="Georgia" pitchFamily="34" charset="-122"/>
+                <a:cs typeface="Georgia" pitchFamily="34" charset="-120"/>
+              </a:rPr>
+              <a:t>$4.4M</a:t>
+            </a:r>
+            <a:endParaRPr lang="en-US" sz="1800" dirty="0"/>
+          </a:p>
+        </p:txBody>
+      </p:sp>
+      <p:sp>
+        <p:nvSpPr>
+          <p:cNvPr id="28" name="Text 25"/>
+          <p:cNvSpPr/>
+          <p:nvPr/>
+        </p:nvSpPr>
+        <p:spPr>
+          <a:xfrm>
+            <a:off x="914400" y="4608576"/>
+            <a:ext cx="2011680" cy="292608"/>
+          </a:xfrm>
+          <a:prstGeom prst="rect">
+            <a:avLst/>
+          </a:prstGeom>
+          <a:noFill/>
+          <a:ln/>
+        </p:spPr>
+        <p:txBody>
+          <a:bodyPr wrap="square" lIns="0" tIns="0" rIns="0" bIns="0" rtlCol="0" anchor="ctr"/>
+          <a:lstStyle/>
+          <a:p>
+            <a:pPr indent="0" marL="0">
+              <a:buNone/>
+            </a:pPr>
+            <a:r>
+              <a:rPr lang="en-US" sz="1000" dirty="0">
+                <a:solidFill>
+                  <a:srgbClr val="999999"/>
                 </a:solidFill>
                 <a:latin typeface="Calibri" pitchFamily="34" charset="0"/>
                 <a:ea typeface="Calibri" pitchFamily="34" charset="-122"/>
                 <a:cs typeface="Calibri" pitchFamily="34" charset="-120"/>
               </a:rPr>
-              <a:t>Q3 2026</a:t>
-            </a:r>
-            <a:endParaRPr lang="en-US" sz="1200" dirty="0"/>
-          </a:p>
-        </p:txBody>
-      </p:sp>
-      <p:sp>
-        <p:nvSpPr>
-          <p:cNvPr id="15" name="Text 12"/>
-          <p:cNvSpPr/>
-          <p:nvPr/>
-        </p:nvSpPr>
-        <p:spPr>
-          <a:xfrm>
-            <a:off x="5943600" y="2148840"/>
-            <a:ext cx="2377440" cy="320040"/>
-          </a:xfrm>
-          <a:prstGeom prst="rect">
-            <a:avLst/>
-          </a:prstGeom>
-          <a:noFill/>
-          <a:ln/>
-        </p:spPr>
-        <p:txBody>
-          <a:bodyPr wrap="square" lIns="0" tIns="0" rIns="0" bIns="0" rtlCol="0" anchor="ctr"/>
-          <a:lstStyle/>
-          <a:p>
-            <a:pPr indent="0" marL="0">
-              <a:buNone/>
-            </a:pPr>
-            <a:r>
-              <a:rPr lang="en-US" sz="1100" dirty="0">
+              <a:t>Avoided per Domain</a:t>
+            </a:r>
+            <a:endParaRPr lang="en-US" sz="1000" dirty="0"/>
+          </a:p>
+          <a:p>
+            <a:pPr indent="0" marL="0">
+              <a:buNone/>
+            </a:pPr>
+            <a:r>
+              <a:rPr lang="en-US" sz="1000" dirty="0">
                 <a:solidFill>
                   <a:srgbClr val="999999"/>
                 </a:solidFill>
@@ -8523,97 +8965,94 @@
                 <a:ea typeface="Calibri" pitchFamily="34" charset="-122"/>
                 <a:cs typeface="Calibri" pitchFamily="34" charset="-120"/>
               </a:rPr>
-              <a:t>Alpha — Mapping + Simulation Agents</a:t>
-            </a:r>
-            <a:endParaRPr lang="en-US" sz="1100" dirty="0"/>
-          </a:p>
-        </p:txBody>
-      </p:sp>
-      <p:sp>
-        <p:nvSpPr>
-          <p:cNvPr id="16" name="Shape 13"/>
-          <p:cNvSpPr/>
-          <p:nvPr/>
-        </p:nvSpPr>
-        <p:spPr>
-          <a:xfrm>
-            <a:off x="4892040" y="2606040"/>
-            <a:ext cx="73152" cy="320040"/>
-          </a:xfrm>
-          <a:prstGeom prst="rect">
-            <a:avLst/>
-          </a:prstGeom>
-          <a:solidFill>
-            <a:srgbClr val="7F77DD"/>
-          </a:solidFill>
-          <a:ln/>
-        </p:spPr>
-      </p:sp>
-      <p:sp>
-        <p:nvSpPr>
-          <p:cNvPr id="17" name="Text 14"/>
-          <p:cNvSpPr/>
-          <p:nvPr/>
-        </p:nvSpPr>
-        <p:spPr>
-          <a:xfrm>
-            <a:off x="5074920" y="2606040"/>
-            <a:ext cx="822960" cy="320040"/>
-          </a:xfrm>
-          <a:prstGeom prst="rect">
-            <a:avLst/>
-          </a:prstGeom>
-          <a:noFill/>
-          <a:ln/>
-        </p:spPr>
-        <p:txBody>
-          <a:bodyPr wrap="square" lIns="0" tIns="0" rIns="0" bIns="0" rtlCol="0" anchor="ctr"/>
-          <a:lstStyle/>
-          <a:p>
-            <a:pPr indent="0" marL="0">
-              <a:buNone/>
-            </a:pPr>
-            <a:r>
-              <a:rPr lang="en-US" sz="1200" b="1" dirty="0">
-                <a:solidFill>
-                  <a:srgbClr val="7F77DD"/>
+              <a:t>Admin breach</a:t>
+            </a:r>
+            <a:endParaRPr lang="en-US" sz="1000" dirty="0"/>
+          </a:p>
+        </p:txBody>
+      </p:sp>
+      <p:sp>
+        <p:nvSpPr>
+          <p:cNvPr id="29" name="Text 26"/>
+          <p:cNvSpPr/>
+          <p:nvPr/>
+        </p:nvSpPr>
+        <p:spPr>
+          <a:xfrm>
+            <a:off x="3474720" y="4407408"/>
+            <a:ext cx="1371600" cy="201168"/>
+          </a:xfrm>
+          <a:prstGeom prst="rect">
+            <a:avLst/>
+          </a:prstGeom>
+          <a:noFill/>
+          <a:ln/>
+        </p:spPr>
+        <p:txBody>
+          <a:bodyPr wrap="square" lIns="0" tIns="0" rIns="0" bIns="0" rtlCol="0" anchor="ctr"/>
+          <a:lstStyle/>
+          <a:p>
+            <a:pPr indent="0" marL="0">
+              <a:buNone/>
+            </a:pPr>
+            <a:r>
+              <a:rPr lang="en-US" sz="1800" b="1" dirty="0">
+                <a:solidFill>
+                  <a:srgbClr val="C9A84C"/>
+                </a:solidFill>
+                <a:latin typeface="Georgia" pitchFamily="34" charset="0"/>
+                <a:ea typeface="Georgia" pitchFamily="34" charset="-122"/>
+                <a:cs typeface="Georgia" pitchFamily="34" charset="-120"/>
+              </a:rPr>
+              <a:t>85%</a:t>
+            </a:r>
+            <a:endParaRPr lang="en-US" sz="1800" dirty="0"/>
+          </a:p>
+        </p:txBody>
+      </p:sp>
+      <p:sp>
+        <p:nvSpPr>
+          <p:cNvPr id="30" name="Text 27"/>
+          <p:cNvSpPr/>
+          <p:nvPr/>
+        </p:nvSpPr>
+        <p:spPr>
+          <a:xfrm>
+            <a:off x="3474720" y="4608576"/>
+            <a:ext cx="2011680" cy="292608"/>
+          </a:xfrm>
+          <a:prstGeom prst="rect">
+            <a:avLst/>
+          </a:prstGeom>
+          <a:noFill/>
+          <a:ln/>
+        </p:spPr>
+        <p:txBody>
+          <a:bodyPr wrap="square" lIns="0" tIns="0" rIns="0" bIns="0" rtlCol="0" anchor="ctr"/>
+          <a:lstStyle/>
+          <a:p>
+            <a:pPr indent="0" marL="0">
+              <a:buNone/>
+            </a:pPr>
+            <a:r>
+              <a:rPr lang="en-US" sz="1000" dirty="0">
+                <a:solidFill>
+                  <a:srgbClr val="999999"/>
                 </a:solidFill>
                 <a:latin typeface="Calibri" pitchFamily="34" charset="0"/>
                 <a:ea typeface="Calibri" pitchFamily="34" charset="-122"/>
                 <a:cs typeface="Calibri" pitchFamily="34" charset="-120"/>
               </a:rPr>
-              <a:t>Q4 2026</a:t>
-            </a:r>
-            <a:endParaRPr lang="en-US" sz="1200" dirty="0"/>
-          </a:p>
-        </p:txBody>
-      </p:sp>
-      <p:sp>
-        <p:nvSpPr>
-          <p:cNvPr id="18" name="Text 15"/>
-          <p:cNvSpPr/>
-          <p:nvPr/>
-        </p:nvSpPr>
-        <p:spPr>
-          <a:xfrm>
-            <a:off x="5943600" y="2606040"/>
-            <a:ext cx="2377440" cy="320040"/>
-          </a:xfrm>
-          <a:prstGeom prst="rect">
-            <a:avLst/>
-          </a:prstGeom>
-          <a:noFill/>
-          <a:ln/>
-        </p:spPr>
-        <p:txBody>
-          <a:bodyPr wrap="square" lIns="0" tIns="0" rIns="0" bIns="0" rtlCol="0" anchor="ctr"/>
-          <a:lstStyle/>
-          <a:p>
-            <a:pPr indent="0" marL="0">
-              <a:buNone/>
-            </a:pPr>
-            <a:r>
-              <a:rPr lang="en-US" sz="1100" dirty="0">
+              <a:t>OpEx savings on</a:t>
+            </a:r>
+            <a:endParaRPr lang="en-US" sz="1000" dirty="0"/>
+          </a:p>
+          <a:p>
+            <a:pPr indent="0" marL="0">
+              <a:buNone/>
+            </a:pPr>
+            <a:r>
+              <a:rPr lang="en-US" sz="1000" dirty="0">
                 <a:solidFill>
                   <a:srgbClr val="999999"/>
                 </a:solidFill>
@@ -8621,97 +9060,94 @@
                 <a:ea typeface="Calibri" pitchFamily="34" charset="-122"/>
                 <a:cs typeface="Calibri" pitchFamily="34" charset="-120"/>
               </a:rPr>
-              <a:t>Beta — Remediation + TruConfirm integration</a:t>
-            </a:r>
-            <a:endParaRPr lang="en-US" sz="1100" dirty="0"/>
-          </a:p>
-        </p:txBody>
-      </p:sp>
-      <p:sp>
-        <p:nvSpPr>
-          <p:cNvPr id="19" name="Shape 16"/>
-          <p:cNvSpPr/>
-          <p:nvPr/>
-        </p:nvSpPr>
-        <p:spPr>
-          <a:xfrm>
-            <a:off x="4892040" y="3063240"/>
-            <a:ext cx="73152" cy="320040"/>
-          </a:xfrm>
-          <a:prstGeom prst="rect">
-            <a:avLst/>
-          </a:prstGeom>
-          <a:solidFill>
-            <a:srgbClr val="1D9E75"/>
-          </a:solidFill>
-          <a:ln/>
-        </p:spPr>
-      </p:sp>
-      <p:sp>
-        <p:nvSpPr>
-          <p:cNvPr id="20" name="Text 17"/>
-          <p:cNvSpPr/>
-          <p:nvPr/>
-        </p:nvSpPr>
-        <p:spPr>
-          <a:xfrm>
-            <a:off x="5074920" y="3063240"/>
-            <a:ext cx="822960" cy="320040"/>
-          </a:xfrm>
-          <a:prstGeom prst="rect">
-            <a:avLst/>
-          </a:prstGeom>
-          <a:noFill/>
-          <a:ln/>
-        </p:spPr>
-        <p:txBody>
-          <a:bodyPr wrap="square" lIns="0" tIns="0" rIns="0" bIns="0" rtlCol="0" anchor="ctr"/>
-          <a:lstStyle/>
-          <a:p>
-            <a:pPr indent="0" marL="0">
-              <a:buNone/>
-            </a:pPr>
-            <a:r>
-              <a:rPr lang="en-US" sz="1200" b="1" dirty="0">
-                <a:solidFill>
-                  <a:srgbClr val="1D9E75"/>
+              <a:t>incident response</a:t>
+            </a:r>
+            <a:endParaRPr lang="en-US" sz="1000" dirty="0"/>
+          </a:p>
+        </p:txBody>
+      </p:sp>
+      <p:sp>
+        <p:nvSpPr>
+          <p:cNvPr id="31" name="Text 28"/>
+          <p:cNvSpPr/>
+          <p:nvPr/>
+        </p:nvSpPr>
+        <p:spPr>
+          <a:xfrm>
+            <a:off x="6035040" y="4407408"/>
+            <a:ext cx="1371600" cy="201168"/>
+          </a:xfrm>
+          <a:prstGeom prst="rect">
+            <a:avLst/>
+          </a:prstGeom>
+          <a:noFill/>
+          <a:ln/>
+        </p:spPr>
+        <p:txBody>
+          <a:bodyPr wrap="square" lIns="0" tIns="0" rIns="0" bIns="0" rtlCol="0" anchor="ctr"/>
+          <a:lstStyle/>
+          <a:p>
+            <a:pPr indent="0" marL="0">
+              <a:buNone/>
+            </a:pPr>
+            <a:r>
+              <a:rPr lang="en-US" sz="1800" b="1" dirty="0">
+                <a:solidFill>
+                  <a:srgbClr val="C9A84C"/>
+                </a:solidFill>
+                <a:latin typeface="Georgia" pitchFamily="34" charset="0"/>
+                <a:ea typeface="Georgia" pitchFamily="34" charset="-122"/>
+                <a:cs typeface="Georgia" pitchFamily="34" charset="-120"/>
+              </a:rPr>
+              <a:t>10x</a:t>
+            </a:r>
+            <a:endParaRPr lang="en-US" sz="1800" dirty="0"/>
+          </a:p>
+        </p:txBody>
+      </p:sp>
+      <p:sp>
+        <p:nvSpPr>
+          <p:cNvPr id="32" name="Text 29"/>
+          <p:cNvSpPr/>
+          <p:nvPr/>
+        </p:nvSpPr>
+        <p:spPr>
+          <a:xfrm>
+            <a:off x="6035040" y="4608576"/>
+            <a:ext cx="2011680" cy="292608"/>
+          </a:xfrm>
+          <a:prstGeom prst="rect">
+            <a:avLst/>
+          </a:prstGeom>
+          <a:noFill/>
+          <a:ln/>
+        </p:spPr>
+        <p:txBody>
+          <a:bodyPr wrap="square" lIns="0" tIns="0" rIns="0" bIns="0" rtlCol="0" anchor="ctr"/>
+          <a:lstStyle/>
+          <a:p>
+            <a:pPr indent="0" marL="0">
+              <a:buNone/>
+            </a:pPr>
+            <a:r>
+              <a:rPr lang="en-US" sz="1000" dirty="0">
+                <a:solidFill>
+                  <a:srgbClr val="999999"/>
                 </a:solidFill>
                 <a:latin typeface="Calibri" pitchFamily="34" charset="0"/>
                 <a:ea typeface="Calibri" pitchFamily="34" charset="-122"/>
                 <a:cs typeface="Calibri" pitchFamily="34" charset="-120"/>
               </a:rPr>
-              <a:t>Q1 2027</a:t>
-            </a:r>
-            <a:endParaRPr lang="en-US" sz="1200" dirty="0"/>
-          </a:p>
-        </p:txBody>
-      </p:sp>
-      <p:sp>
-        <p:nvSpPr>
-          <p:cNvPr id="21" name="Text 18"/>
-          <p:cNvSpPr/>
-          <p:nvPr/>
-        </p:nvSpPr>
-        <p:spPr>
-          <a:xfrm>
-            <a:off x="5943600" y="3063240"/>
-            <a:ext cx="2377440" cy="320040"/>
-          </a:xfrm>
-          <a:prstGeom prst="rect">
-            <a:avLst/>
-          </a:prstGeom>
-          <a:noFill/>
-          <a:ln/>
-        </p:spPr>
-        <p:txBody>
-          <a:bodyPr wrap="square" lIns="0" tIns="0" rIns="0" bIns="0" rtlCol="0" anchor="ctr"/>
-          <a:lstStyle/>
-          <a:p>
-            <a:pPr indent="0" marL="0">
-              <a:buNone/>
-            </a:pPr>
-            <a:r>
-              <a:rPr lang="en-US" sz="1100" dirty="0">
+              <a:t>Capacity multiplier</a:t>
+            </a:r>
+            <a:endParaRPr lang="en-US" sz="1000" dirty="0"/>
+          </a:p>
+          <a:p>
+            <a:pPr indent="0" marL="0">
+              <a:buNone/>
+            </a:pPr>
+            <a:r>
+              <a:rPr lang="en-US" sz="1000" dirty="0">
                 <a:solidFill>
                   <a:srgbClr val="999999"/>
                 </a:solidFill>
@@ -8719,86 +9155,7 @@
                 <a:ea typeface="Calibri" pitchFamily="34" charset="-122"/>
                 <a:cs typeface="Calibri" pitchFamily="34" charset="-120"/>
               </a:rPr>
-              <a:t>GTM Launch</a:t>
-            </a:r>
-            <a:endParaRPr lang="en-US" sz="1100" dirty="0"/>
-          </a:p>
-        </p:txBody>
-      </p:sp>
-      <p:sp>
-        <p:nvSpPr>
-          <p:cNvPr id="22" name="Shape 19"/>
-          <p:cNvSpPr/>
-          <p:nvPr/>
-        </p:nvSpPr>
-        <p:spPr>
-          <a:xfrm>
-            <a:off x="640080" y="3840480"/>
-            <a:ext cx="7863840" cy="960120"/>
-          </a:xfrm>
-          <a:prstGeom prst="rect">
-            <a:avLst/>
-          </a:prstGeom>
-          <a:solidFill>
-            <a:srgbClr val="1A1A1A"/>
-          </a:solidFill>
-          <a:ln/>
-        </p:spPr>
-      </p:sp>
-      <p:sp>
-        <p:nvSpPr>
-          <p:cNvPr id="23" name="Shape 20"/>
-          <p:cNvSpPr/>
-          <p:nvPr/>
-        </p:nvSpPr>
-        <p:spPr>
-          <a:xfrm>
-            <a:off x="640080" y="3840480"/>
-            <a:ext cx="54864" cy="960120"/>
-          </a:xfrm>
-          <a:prstGeom prst="rect">
-            <a:avLst/>
-          </a:prstGeom>
-          <a:solidFill>
-            <a:srgbClr val="C9A84C"/>
-          </a:solidFill>
-          <a:ln/>
-        </p:spPr>
-      </p:sp>
-      <p:sp>
-        <p:nvSpPr>
-          <p:cNvPr id="24" name="Text 21"/>
-          <p:cNvSpPr/>
-          <p:nvPr/>
-        </p:nvSpPr>
-        <p:spPr>
-          <a:xfrm>
-            <a:off x="868680" y="3913632"/>
-            <a:ext cx="2743200" cy="228600"/>
-          </a:xfrm>
-          <a:prstGeom prst="rect">
-            <a:avLst/>
-          </a:prstGeom>
-          <a:noFill/>
-          <a:ln/>
-        </p:spPr>
-        <p:txBody>
-          <a:bodyPr wrap="square" lIns="0" tIns="0" rIns="0" bIns="0" rtlCol="0" anchor="ctr"/>
-          <a:lstStyle/>
-          <a:p>
-            <a:pPr indent="0" marL="0">
-              <a:buNone/>
-            </a:pPr>
-            <a:r>
-              <a:rPr lang="en-US" sz="1000" b="1" spc="200" kern="0" dirty="0">
-                <a:solidFill>
-                  <a:srgbClr val="C9A84C"/>
-                </a:solidFill>
-                <a:latin typeface="Calibri" pitchFamily="34" charset="0"/>
-                <a:ea typeface="Calibri" pitchFamily="34" charset="-122"/>
-                <a:cs typeface="Calibri" pitchFamily="34" charset="-120"/>
-              </a:rPr>
-              <a:t>ROI HIGHLIGHTS</a:t>
+              <a:t>zero headcount add</a:t>
             </a:r>
             <a:endParaRPr lang="en-US" sz="1000" dirty="0"/>
           </a:p>
@@ -8806,292 +9163,7 @@
       </p:sp>
       <p:sp>
         <p:nvSpPr>
-          <p:cNvPr id="25" name="Text 22"/>
-          <p:cNvSpPr/>
-          <p:nvPr/>
-        </p:nvSpPr>
-        <p:spPr>
-          <a:xfrm>
-            <a:off x="914400" y="4160520"/>
-            <a:ext cx="1371600" cy="320040"/>
-          </a:xfrm>
-          <a:prstGeom prst="rect">
-            <a:avLst/>
-          </a:prstGeom>
-          <a:noFill/>
-          <a:ln/>
-        </p:spPr>
-        <p:txBody>
-          <a:bodyPr wrap="square" lIns="0" tIns="0" rIns="0" bIns="0" rtlCol="0" anchor="ctr"/>
-          <a:lstStyle/>
-          <a:p>
-            <a:pPr indent="0" marL="0">
-              <a:buNone/>
-            </a:pPr>
-            <a:r>
-              <a:rPr lang="en-US" sz="2400" b="1" dirty="0">
-                <a:solidFill>
-                  <a:srgbClr val="C9A84C"/>
-                </a:solidFill>
-                <a:latin typeface="Georgia" pitchFamily="34" charset="0"/>
-                <a:ea typeface="Georgia" pitchFamily="34" charset="-122"/>
-                <a:cs typeface="Georgia" pitchFamily="34" charset="-120"/>
-              </a:rPr>
-              <a:t>$4.4M</a:t>
-            </a:r>
-            <a:endParaRPr lang="en-US" sz="2400" dirty="0"/>
-          </a:p>
-        </p:txBody>
-      </p:sp>
-      <p:sp>
-        <p:nvSpPr>
-          <p:cNvPr id="26" name="Text 23"/>
-          <p:cNvSpPr/>
-          <p:nvPr/>
-        </p:nvSpPr>
-        <p:spPr>
-          <a:xfrm>
-            <a:off x="914400" y="4434840"/>
-            <a:ext cx="2011680" cy="320040"/>
-          </a:xfrm>
-          <a:prstGeom prst="rect">
-            <a:avLst/>
-          </a:prstGeom>
-          <a:noFill/>
-          <a:ln/>
-        </p:spPr>
-        <p:txBody>
-          <a:bodyPr wrap="square" lIns="0" tIns="0" rIns="0" bIns="0" rtlCol="0" anchor="ctr"/>
-          <a:lstStyle/>
-          <a:p>
-            <a:pPr indent="0" marL="0">
-              <a:buNone/>
-            </a:pPr>
-            <a:r>
-              <a:rPr lang="en-US" sz="1000" dirty="0">
-                <a:solidFill>
-                  <a:srgbClr val="999999"/>
-                </a:solidFill>
-                <a:latin typeface="Calibri" pitchFamily="34" charset="0"/>
-                <a:ea typeface="Calibri" pitchFamily="34" charset="-122"/>
-                <a:cs typeface="Calibri" pitchFamily="34" charset="-120"/>
-              </a:rPr>
-              <a:t>Avg. cost of a single</a:t>
-            </a:r>
-            <a:endParaRPr lang="en-US" sz="1000" dirty="0"/>
-          </a:p>
-          <a:p>
-            <a:pPr indent="0" marL="0">
-              <a:buNone/>
-            </a:pPr>
-            <a:r>
-              <a:rPr lang="en-US" sz="1000" dirty="0">
-                <a:solidFill>
-                  <a:srgbClr val="999999"/>
-                </a:solidFill>
-                <a:latin typeface="Calibri" pitchFamily="34" charset="0"/>
-                <a:ea typeface="Calibri" pitchFamily="34" charset="-122"/>
-                <a:cs typeface="Calibri" pitchFamily="34" charset="-120"/>
-              </a:rPr>
-              <a:t>Domain Admin breach</a:t>
-            </a:r>
-            <a:endParaRPr lang="en-US" sz="1000" dirty="0"/>
-          </a:p>
-        </p:txBody>
-      </p:sp>
-      <p:sp>
-        <p:nvSpPr>
-          <p:cNvPr id="27" name="Text 24"/>
-          <p:cNvSpPr/>
-          <p:nvPr/>
-        </p:nvSpPr>
-        <p:spPr>
-          <a:xfrm>
-            <a:off x="3474720" y="4160520"/>
-            <a:ext cx="1371600" cy="320040"/>
-          </a:xfrm>
-          <a:prstGeom prst="rect">
-            <a:avLst/>
-          </a:prstGeom>
-          <a:noFill/>
-          <a:ln/>
-        </p:spPr>
-        <p:txBody>
-          <a:bodyPr wrap="square" lIns="0" tIns="0" rIns="0" bIns="0" rtlCol="0" anchor="ctr"/>
-          <a:lstStyle/>
-          <a:p>
-            <a:pPr indent="0" marL="0">
-              <a:buNone/>
-            </a:pPr>
-            <a:r>
-              <a:rPr lang="en-US" sz="2400" b="1" dirty="0">
-                <a:solidFill>
-                  <a:srgbClr val="C9A84C"/>
-                </a:solidFill>
-                <a:latin typeface="Georgia" pitchFamily="34" charset="0"/>
-                <a:ea typeface="Georgia" pitchFamily="34" charset="-122"/>
-                <a:cs typeface="Georgia" pitchFamily="34" charset="-120"/>
-              </a:rPr>
-              <a:t>85%</a:t>
-            </a:r>
-            <a:endParaRPr lang="en-US" sz="2400" dirty="0"/>
-          </a:p>
-        </p:txBody>
-      </p:sp>
-      <p:sp>
-        <p:nvSpPr>
-          <p:cNvPr id="28" name="Text 25"/>
-          <p:cNvSpPr/>
-          <p:nvPr/>
-        </p:nvSpPr>
-        <p:spPr>
-          <a:xfrm>
-            <a:off x="3474720" y="4434840"/>
-            <a:ext cx="2011680" cy="320040"/>
-          </a:xfrm>
-          <a:prstGeom prst="rect">
-            <a:avLst/>
-          </a:prstGeom>
-          <a:noFill/>
-          <a:ln/>
-        </p:spPr>
-        <p:txBody>
-          <a:bodyPr wrap="square" lIns="0" tIns="0" rIns="0" bIns="0" rtlCol="0" anchor="ctr"/>
-          <a:lstStyle/>
-          <a:p>
-            <a:pPr indent="0" marL="0">
-              <a:buNone/>
-            </a:pPr>
-            <a:r>
-              <a:rPr lang="en-US" sz="1000" dirty="0">
-                <a:solidFill>
-                  <a:srgbClr val="999999"/>
-                </a:solidFill>
-                <a:latin typeface="Calibri" pitchFamily="34" charset="0"/>
-                <a:ea typeface="Calibri" pitchFamily="34" charset="-122"/>
-                <a:cs typeface="Calibri" pitchFamily="34" charset="-120"/>
-              </a:rPr>
-              <a:t>Reduction in</a:t>
-            </a:r>
-            <a:endParaRPr lang="en-US" sz="1000" dirty="0"/>
-          </a:p>
-          <a:p>
-            <a:pPr indent="0" marL="0">
-              <a:buNone/>
-            </a:pPr>
-            <a:r>
-              <a:rPr lang="en-US" sz="1000" dirty="0">
-                <a:solidFill>
-                  <a:srgbClr val="999999"/>
-                </a:solidFill>
-                <a:latin typeface="Calibri" pitchFamily="34" charset="0"/>
-                <a:ea typeface="Calibri" pitchFamily="34" charset="-122"/>
-                <a:cs typeface="Calibri" pitchFamily="34" charset="-120"/>
-              </a:rPr>
-              <a:t>human-hours per incident</a:t>
-            </a:r>
-            <a:endParaRPr lang="en-US" sz="1000" dirty="0"/>
-          </a:p>
-        </p:txBody>
-      </p:sp>
-      <p:sp>
-        <p:nvSpPr>
-          <p:cNvPr id="29" name="Text 26"/>
-          <p:cNvSpPr/>
-          <p:nvPr/>
-        </p:nvSpPr>
-        <p:spPr>
-          <a:xfrm>
-            <a:off x="6035040" y="4160520"/>
-            <a:ext cx="1371600" cy="320040"/>
-          </a:xfrm>
-          <a:prstGeom prst="rect">
-            <a:avLst/>
-          </a:prstGeom>
-          <a:noFill/>
-          <a:ln/>
-        </p:spPr>
-        <p:txBody>
-          <a:bodyPr wrap="square" lIns="0" tIns="0" rIns="0" bIns="0" rtlCol="0" anchor="ctr"/>
-          <a:lstStyle/>
-          <a:p>
-            <a:pPr indent="0" marL="0">
-              <a:buNone/>
-            </a:pPr>
-            <a:r>
-              <a:rPr lang="en-US" sz="2400" b="1" dirty="0">
-                <a:solidFill>
-                  <a:srgbClr val="C9A84C"/>
-                </a:solidFill>
-                <a:latin typeface="Georgia" pitchFamily="34" charset="0"/>
-                <a:ea typeface="Georgia" pitchFamily="34" charset="-122"/>
-                <a:cs typeface="Georgia" pitchFamily="34" charset="-120"/>
-              </a:rPr>
-              <a:t>10×</a:t>
-            </a:r>
-            <a:endParaRPr lang="en-US" sz="2400" dirty="0"/>
-          </a:p>
-        </p:txBody>
-      </p:sp>
-      <p:sp>
-        <p:nvSpPr>
-          <p:cNvPr id="30" name="Text 27"/>
-          <p:cNvSpPr/>
-          <p:nvPr/>
-        </p:nvSpPr>
-        <p:spPr>
-          <a:xfrm>
-            <a:off x="6035040" y="4434840"/>
-            <a:ext cx="2011680" cy="320040"/>
-          </a:xfrm>
-          <a:prstGeom prst="rect">
-            <a:avLst/>
-          </a:prstGeom>
-          <a:noFill/>
-          <a:ln/>
-        </p:spPr>
-        <p:txBody>
-          <a:bodyPr wrap="square" lIns="0" tIns="0" rIns="0" bIns="0" rtlCol="0" anchor="ctr"/>
-          <a:lstStyle/>
-          <a:p>
-            <a:pPr indent="0" marL="0">
-              <a:buNone/>
-            </a:pPr>
-            <a:r>
-              <a:rPr lang="en-US" sz="1000" dirty="0">
-                <a:solidFill>
-                  <a:srgbClr val="999999"/>
-                </a:solidFill>
-                <a:latin typeface="Calibri" pitchFamily="34" charset="0"/>
-                <a:ea typeface="Calibri" pitchFamily="34" charset="-122"/>
-                <a:cs typeface="Calibri" pitchFamily="34" charset="-120"/>
-              </a:rPr>
-              <a:t>Asset volume handled</a:t>
-            </a:r>
-            <a:endParaRPr lang="en-US" sz="1000" dirty="0"/>
-          </a:p>
-          <a:p>
-            <a:pPr indent="0" marL="0">
-              <a:buNone/>
-            </a:pPr>
-            <a:r>
-              <a:rPr lang="en-US" sz="1000" dirty="0">
-                <a:solidFill>
-                  <a:srgbClr val="999999"/>
-                </a:solidFill>
-                <a:latin typeface="Calibri" pitchFamily="34" charset="0"/>
-                <a:ea typeface="Calibri" pitchFamily="34" charset="-122"/>
-                <a:cs typeface="Calibri" pitchFamily="34" charset="-120"/>
-              </a:rPr>
-              <a:t>by existing SOC team</a:t>
-            </a:r>
-            <a:endParaRPr lang="en-US" sz="1000" dirty="0"/>
-          </a:p>
-        </p:txBody>
-      </p:sp>
-      <p:sp>
-        <p:nvSpPr>
-          <p:cNvPr id="31" name="Text 28"/>
+          <p:cNvPr id="33" name="Text 30"/>
           <p:cNvSpPr/>
           <p:nvPr/>
         </p:nvSpPr>
